--- a/e2e/fixtures/media-bookmark-trigger-editable.pptx
+++ b/e2e/fixtures/media-bookmark-trigger-editable.pptx
@@ -3537,11 +3537,7 @@
                                       <p:childTnLst>
                                         <p:set>
                                           <p:cBhvr>
-                                            <p:cTn id="20" dur="1" fill="hold">
-                                              <p:stCondLst>
-                                                <p:cond delay="0"/>
-                                              </p:stCondLst>
-                                            </p:cTn>
+                                            <p:cTn id="20" dur="1" fill="hold"/>
                                             <p:tgtEl>
                                               <p:spTgt spid="4"/>
                                             </p:tgtEl>
@@ -3811,11 +3807,7 @@
                                       <p:childTnLst>
                                         <p:set>
                                           <p:cBhvr>
-                                            <p:cTn id="20" dur="1" fill="hold">
-                                              <p:stCondLst>
-                                                <p:cond delay="0"/>
-                                              </p:stCondLst>
-                                            </p:cTn>
+                                            <p:cTn id="20" dur="1" fill="hold"/>
                                             <p:tgtEl>
                                               <p:spTgt spid="4"/>
                                             </p:tgtEl>
